--- a/ゲーム科1年/00_前期/ゲームプログラミングⅢ/ゲーム数学/座学/09_度とラジアン.pptx
+++ b/ゲーム科1年/00_前期/ゲームプログラミングⅢ/ゲーム数学/座学/09_度とラジアン.pptx
@@ -266,7 +266,7 @@
           <a:p>
             <a:fld id="{E9CC885B-4903-4D54-9A93-00025F12DED9}" type="datetimeFigureOut">
               <a:rPr kumimoji="1" lang="ja-JP" altLang="en-US" smtClean="0"/>
-              <a:t>2024/10/4</a:t>
+              <a:t>2025/6/24</a:t>
             </a:fld>
             <a:endParaRPr kumimoji="1" lang="ja-JP" altLang="en-US"/>
           </a:p>
@@ -496,7 +496,7 @@
           <a:p>
             <a:fld id="{E9CC885B-4903-4D54-9A93-00025F12DED9}" type="datetimeFigureOut">
               <a:rPr kumimoji="1" lang="ja-JP" altLang="en-US" smtClean="0"/>
-              <a:t>2024/10/4</a:t>
+              <a:t>2025/6/24</a:t>
             </a:fld>
             <a:endParaRPr kumimoji="1" lang="ja-JP" altLang="en-US"/>
           </a:p>
@@ -736,7 +736,7 @@
           <a:p>
             <a:fld id="{E9CC885B-4903-4D54-9A93-00025F12DED9}" type="datetimeFigureOut">
               <a:rPr kumimoji="1" lang="ja-JP" altLang="en-US" smtClean="0"/>
-              <a:t>2024/10/4</a:t>
+              <a:t>2025/6/24</a:t>
             </a:fld>
             <a:endParaRPr kumimoji="1" lang="ja-JP" altLang="en-US"/>
           </a:p>
@@ -966,7 +966,7 @@
           <a:p>
             <a:fld id="{E9CC885B-4903-4D54-9A93-00025F12DED9}" type="datetimeFigureOut">
               <a:rPr kumimoji="1" lang="ja-JP" altLang="en-US" smtClean="0"/>
-              <a:t>2024/10/4</a:t>
+              <a:t>2025/6/24</a:t>
             </a:fld>
             <a:endParaRPr kumimoji="1" lang="ja-JP" altLang="en-US"/>
           </a:p>
@@ -1241,7 +1241,7 @@
           <a:p>
             <a:fld id="{E9CC885B-4903-4D54-9A93-00025F12DED9}" type="datetimeFigureOut">
               <a:rPr kumimoji="1" lang="ja-JP" altLang="en-US" smtClean="0"/>
-              <a:t>2024/10/4</a:t>
+              <a:t>2025/6/24</a:t>
             </a:fld>
             <a:endParaRPr kumimoji="1" lang="ja-JP" altLang="en-US"/>
           </a:p>
@@ -1570,7 +1570,7 @@
           <a:p>
             <a:fld id="{E9CC885B-4903-4D54-9A93-00025F12DED9}" type="datetimeFigureOut">
               <a:rPr kumimoji="1" lang="ja-JP" altLang="en-US" smtClean="0"/>
-              <a:t>2024/10/4</a:t>
+              <a:t>2025/6/24</a:t>
             </a:fld>
             <a:endParaRPr kumimoji="1" lang="ja-JP" altLang="en-US"/>
           </a:p>
@@ -2046,7 +2046,7 @@
           <a:p>
             <a:fld id="{E9CC885B-4903-4D54-9A93-00025F12DED9}" type="datetimeFigureOut">
               <a:rPr kumimoji="1" lang="ja-JP" altLang="en-US" smtClean="0"/>
-              <a:t>2024/10/4</a:t>
+              <a:t>2025/6/24</a:t>
             </a:fld>
             <a:endParaRPr kumimoji="1" lang="ja-JP" altLang="en-US"/>
           </a:p>
@@ -2187,7 +2187,7 @@
           <a:p>
             <a:fld id="{E9CC885B-4903-4D54-9A93-00025F12DED9}" type="datetimeFigureOut">
               <a:rPr kumimoji="1" lang="ja-JP" altLang="en-US" smtClean="0"/>
-              <a:t>2024/10/4</a:t>
+              <a:t>2025/6/24</a:t>
             </a:fld>
             <a:endParaRPr kumimoji="1" lang="ja-JP" altLang="en-US"/>
           </a:p>
@@ -2300,7 +2300,7 @@
           <a:p>
             <a:fld id="{E9CC885B-4903-4D54-9A93-00025F12DED9}" type="datetimeFigureOut">
               <a:rPr kumimoji="1" lang="ja-JP" altLang="en-US" smtClean="0"/>
-              <a:t>2024/10/4</a:t>
+              <a:t>2025/6/24</a:t>
             </a:fld>
             <a:endParaRPr kumimoji="1" lang="ja-JP" altLang="en-US"/>
           </a:p>
@@ -2643,7 +2643,7 @@
           <a:p>
             <a:fld id="{E9CC885B-4903-4D54-9A93-00025F12DED9}" type="datetimeFigureOut">
               <a:rPr kumimoji="1" lang="ja-JP" altLang="en-US" smtClean="0"/>
-              <a:t>2024/10/4</a:t>
+              <a:t>2025/6/24</a:t>
             </a:fld>
             <a:endParaRPr kumimoji="1" lang="ja-JP" altLang="en-US"/>
           </a:p>
@@ -2931,7 +2931,7 @@
           <a:p>
             <a:fld id="{E9CC885B-4903-4D54-9A93-00025F12DED9}" type="datetimeFigureOut">
               <a:rPr kumimoji="1" lang="ja-JP" altLang="en-US" smtClean="0"/>
-              <a:t>2024/10/4</a:t>
+              <a:t>2025/6/24</a:t>
             </a:fld>
             <a:endParaRPr kumimoji="1" lang="ja-JP" altLang="en-US"/>
           </a:p>
@@ -3204,7 +3204,7 @@
           <a:p>
             <a:fld id="{E9CC885B-4903-4D54-9A93-00025F12DED9}" type="datetimeFigureOut">
               <a:rPr kumimoji="1" lang="ja-JP" altLang="en-US" smtClean="0"/>
-              <a:t>2024/10/4</a:t>
+              <a:t>2025/6/24</a:t>
             </a:fld>
             <a:endParaRPr kumimoji="1" lang="ja-JP" altLang="en-US"/>
           </a:p>
@@ -4163,8 +4163,8 @@
           </p:txBody>
         </p:sp>
       </p:grpSp>
-      <mc:AlternateContent xmlns:mc="http://schemas.openxmlformats.org/markup-compatibility/2006">
-        <mc:Choice xmlns:a14="http://schemas.microsoft.com/office/drawing/2010/main" Requires="a14">
+      <mc:AlternateContent xmlns:mc="http://schemas.openxmlformats.org/markup-compatibility/2006" xmlns:a14="http://schemas.microsoft.com/office/drawing/2010/main">
+        <mc:Choice Requires="a14">
           <p:sp>
             <p:nvSpPr>
               <p:cNvPr id="9" name="テキスト ボックス 8">
@@ -4193,6 +4193,7 @@
               </a:bodyPr>
               <a:lstStyle/>
               <a:p>
+                <a:pPr/>
                 <a14:m>
                   <m:oMathPara xmlns:m="http://schemas.openxmlformats.org/officeDocument/2006/math">
                     <m:oMathParaPr>
@@ -4225,7 +4226,7 @@
             </p:txBody>
           </p:sp>
         </mc:Choice>
-        <mc:Fallback>
+        <mc:Fallback xmlns="">
           <p:sp>
             <p:nvSpPr>
               <p:cNvPr id="9" name="テキスト ボックス 8">
@@ -4372,6 +4373,60 @@
       </p:grpSpPr>
       <p:sp>
         <p:nvSpPr>
+          <p:cNvPr id="2" name="四角形: 角を丸くする 1">
+            <a:extLst>
+              <a:ext uri="{FF2B5EF4-FFF2-40B4-BE49-F238E27FC236}">
+                <a16:creationId xmlns:a16="http://schemas.microsoft.com/office/drawing/2014/main" id="{D721E81C-21AF-4C88-A8C7-F3E479AAAF2C}"/>
+              </a:ext>
+            </a:extLst>
+          </p:cNvPr>
+          <p:cNvSpPr/>
+          <p:nvPr/>
+        </p:nvSpPr>
+        <p:spPr>
+          <a:xfrm>
+            <a:off x="397934" y="3056467"/>
+            <a:ext cx="4224866" cy="1295400"/>
+          </a:xfrm>
+          <a:prstGeom prst="roundRect">
+            <a:avLst/>
+          </a:prstGeom>
+          <a:solidFill>
+            <a:schemeClr val="bg1">
+              <a:lumMod val="85000"/>
+            </a:schemeClr>
+          </a:solidFill>
+          <a:ln>
+            <a:noFill/>
+          </a:ln>
+        </p:spPr>
+        <p:style>
+          <a:lnRef idx="2">
+            <a:schemeClr val="accent1">
+              <a:shade val="50000"/>
+            </a:schemeClr>
+          </a:lnRef>
+          <a:fillRef idx="1">
+            <a:schemeClr val="accent1"/>
+          </a:fillRef>
+          <a:effectRef idx="0">
+            <a:schemeClr val="accent1"/>
+          </a:effectRef>
+          <a:fontRef idx="minor">
+            <a:schemeClr val="lt1"/>
+          </a:fontRef>
+        </p:style>
+        <p:txBody>
+          <a:bodyPr rtlCol="0" anchor="ctr"/>
+          <a:lstStyle/>
+          <a:p>
+            <a:pPr algn="ctr"/>
+            <a:endParaRPr kumimoji="1" lang="ja-JP" altLang="en-US"/>
+          </a:p>
+        </p:txBody>
+      </p:sp>
+      <p:sp>
+        <p:nvSpPr>
           <p:cNvPr id="4" name="テキスト ボックス 3">
             <a:extLst>
               <a:ext uri="{FF2B5EF4-FFF2-40B4-BE49-F238E27FC236}">
@@ -4406,8 +4461,8 @@
           </a:p>
         </p:txBody>
       </p:sp>
-      <mc:AlternateContent xmlns:mc="http://schemas.openxmlformats.org/markup-compatibility/2006">
-        <mc:Choice xmlns:a14="http://schemas.microsoft.com/office/drawing/2010/main" Requires="a14">
+      <mc:AlternateContent xmlns:mc="http://schemas.openxmlformats.org/markup-compatibility/2006" xmlns:a14="http://schemas.microsoft.com/office/drawing/2010/main">
+        <mc:Choice Requires="a14">
           <p:sp>
             <p:nvSpPr>
               <p:cNvPr id="6" name="テキスト ボックス 5">
@@ -4721,7 +4776,7 @@
             </p:txBody>
           </p:sp>
         </mc:Choice>
-        <mc:Fallback>
+        <mc:Fallback xmlns="">
           <p:sp>
             <p:nvSpPr>
               <p:cNvPr id="6" name="テキスト ボックス 5">
@@ -4798,6 +4853,60 @@
       </p:grpSpPr>
       <p:sp>
         <p:nvSpPr>
+          <p:cNvPr id="5" name="四角形: 角を丸くする 4">
+            <a:extLst>
+              <a:ext uri="{FF2B5EF4-FFF2-40B4-BE49-F238E27FC236}">
+                <a16:creationId xmlns:a16="http://schemas.microsoft.com/office/drawing/2014/main" id="{FA894803-2239-4F8B-9494-F47D1E7EDD2D}"/>
+              </a:ext>
+            </a:extLst>
+          </p:cNvPr>
+          <p:cNvSpPr/>
+          <p:nvPr/>
+        </p:nvSpPr>
+        <p:spPr>
+          <a:xfrm>
+            <a:off x="385609" y="1752600"/>
+            <a:ext cx="7962523" cy="1295400"/>
+          </a:xfrm>
+          <a:prstGeom prst="roundRect">
+            <a:avLst/>
+          </a:prstGeom>
+          <a:solidFill>
+            <a:schemeClr val="bg1">
+              <a:lumMod val="85000"/>
+            </a:schemeClr>
+          </a:solidFill>
+          <a:ln>
+            <a:noFill/>
+          </a:ln>
+        </p:spPr>
+        <p:style>
+          <a:lnRef idx="2">
+            <a:schemeClr val="accent1">
+              <a:shade val="50000"/>
+            </a:schemeClr>
+          </a:lnRef>
+          <a:fillRef idx="1">
+            <a:schemeClr val="accent1"/>
+          </a:fillRef>
+          <a:effectRef idx="0">
+            <a:schemeClr val="accent1"/>
+          </a:effectRef>
+          <a:fontRef idx="minor">
+            <a:schemeClr val="lt1"/>
+          </a:fontRef>
+        </p:style>
+        <p:txBody>
+          <a:bodyPr rtlCol="0" anchor="ctr"/>
+          <a:lstStyle/>
+          <a:p>
+            <a:pPr algn="ctr"/>
+            <a:endParaRPr kumimoji="1" lang="ja-JP" altLang="en-US"/>
+          </a:p>
+        </p:txBody>
+      </p:sp>
+      <p:sp>
+        <p:nvSpPr>
           <p:cNvPr id="4" name="テキスト ボックス 3">
             <a:extLst>
               <a:ext uri="{FF2B5EF4-FFF2-40B4-BE49-F238E27FC236}">
@@ -4832,8 +4941,8 @@
           </a:p>
         </p:txBody>
       </p:sp>
-      <mc:AlternateContent xmlns:mc="http://schemas.openxmlformats.org/markup-compatibility/2006">
-        <mc:Choice xmlns:a14="http://schemas.microsoft.com/office/drawing/2010/main" Requires="a14">
+      <mc:AlternateContent xmlns:mc="http://schemas.openxmlformats.org/markup-compatibility/2006" xmlns:a14="http://schemas.microsoft.com/office/drawing/2010/main">
+        <mc:Choice Requires="a14">
           <p:sp>
             <p:nvSpPr>
               <p:cNvPr id="6" name="テキスト ボックス 5">
@@ -5075,7 +5184,7 @@
             </p:txBody>
           </p:sp>
         </mc:Choice>
-        <mc:Fallback>
+        <mc:Fallback xmlns="">
           <p:sp>
             <p:nvSpPr>
               <p:cNvPr id="6" name="テキスト ボックス 5">
@@ -5186,8 +5295,8 @@
           </a:p>
         </p:txBody>
       </p:sp>
-      <mc:AlternateContent xmlns:mc="http://schemas.openxmlformats.org/markup-compatibility/2006">
-        <mc:Choice xmlns:a14="http://schemas.microsoft.com/office/drawing/2010/main" Requires="a14">
+      <mc:AlternateContent xmlns:mc="http://schemas.openxmlformats.org/markup-compatibility/2006" xmlns:a14="http://schemas.microsoft.com/office/drawing/2010/main">
+        <mc:Choice Requires="a14">
           <p:sp>
             <p:nvSpPr>
               <p:cNvPr id="6" name="テキスト ボックス 5">
@@ -5390,13 +5499,7 @@
                           <a:rPr lang="en-US" altLang="ja-JP" sz="2400" i="1">
                             <a:latin typeface="Cambria Math" panose="02040503050406030204" pitchFamily="18" charset="0"/>
                           </a:rPr>
-                          <m:t>180</m:t>
-                        </m:r>
-                        <m:r>
-                          <a:rPr lang="en-US" altLang="ja-JP" sz="2400" i="1">
-                            <a:latin typeface="Cambria Math" panose="02040503050406030204" pitchFamily="18" charset="0"/>
-                          </a:rPr>
-                          <m:t>°</m:t>
+                          <m:t>180°</m:t>
                         </m:r>
                       </m:den>
                     </m:f>
@@ -5494,7 +5597,7 @@
             </p:txBody>
           </p:sp>
         </mc:Choice>
-        <mc:Fallback>
+        <mc:Fallback xmlns="">
           <p:sp>
             <p:nvSpPr>
               <p:cNvPr id="6" name="テキスト ボックス 5">
@@ -5571,6 +5674,60 @@
       </p:grpSpPr>
       <p:sp>
         <p:nvSpPr>
+          <p:cNvPr id="5" name="四角形: 角を丸くする 4">
+            <a:extLst>
+              <a:ext uri="{FF2B5EF4-FFF2-40B4-BE49-F238E27FC236}">
+                <a16:creationId xmlns:a16="http://schemas.microsoft.com/office/drawing/2014/main" id="{270EE649-0E55-4665-B2F9-08B70E7311BB}"/>
+              </a:ext>
+            </a:extLst>
+          </p:cNvPr>
+          <p:cNvSpPr/>
+          <p:nvPr/>
+        </p:nvSpPr>
+        <p:spPr>
+          <a:xfrm>
+            <a:off x="419476" y="1814807"/>
+            <a:ext cx="7962523" cy="1295400"/>
+          </a:xfrm>
+          <a:prstGeom prst="roundRect">
+            <a:avLst/>
+          </a:prstGeom>
+          <a:solidFill>
+            <a:schemeClr val="bg1">
+              <a:lumMod val="85000"/>
+            </a:schemeClr>
+          </a:solidFill>
+          <a:ln>
+            <a:noFill/>
+          </a:ln>
+        </p:spPr>
+        <p:style>
+          <a:lnRef idx="2">
+            <a:schemeClr val="accent1">
+              <a:shade val="50000"/>
+            </a:schemeClr>
+          </a:lnRef>
+          <a:fillRef idx="1">
+            <a:schemeClr val="accent1"/>
+          </a:fillRef>
+          <a:effectRef idx="0">
+            <a:schemeClr val="accent1"/>
+          </a:effectRef>
+          <a:fontRef idx="minor">
+            <a:schemeClr val="lt1"/>
+          </a:fontRef>
+        </p:style>
+        <p:txBody>
+          <a:bodyPr rtlCol="0" anchor="ctr"/>
+          <a:lstStyle/>
+          <a:p>
+            <a:pPr algn="ctr"/>
+            <a:endParaRPr kumimoji="1" lang="ja-JP" altLang="en-US"/>
+          </a:p>
+        </p:txBody>
+      </p:sp>
+      <p:sp>
+        <p:nvSpPr>
           <p:cNvPr id="4" name="テキスト ボックス 3">
             <a:extLst>
               <a:ext uri="{FF2B5EF4-FFF2-40B4-BE49-F238E27FC236}">
@@ -5605,8 +5762,8 @@
           </a:p>
         </p:txBody>
       </p:sp>
-      <mc:AlternateContent xmlns:mc="http://schemas.openxmlformats.org/markup-compatibility/2006">
-        <mc:Choice xmlns:a14="http://schemas.microsoft.com/office/drawing/2010/main" Requires="a14">
+      <mc:AlternateContent xmlns:mc="http://schemas.openxmlformats.org/markup-compatibility/2006" xmlns:a14="http://schemas.microsoft.com/office/drawing/2010/main">
+        <mc:Choice Requires="a14">
           <p:sp>
             <p:nvSpPr>
               <p:cNvPr id="6" name="テキスト ボックス 5">
@@ -5870,7 +6027,7 @@
             </p:txBody>
           </p:sp>
         </mc:Choice>
-        <mc:Fallback>
+        <mc:Fallback xmlns="">
           <p:sp>
             <p:nvSpPr>
               <p:cNvPr id="6" name="テキスト ボックス 5">
@@ -5981,8 +6138,8 @@
           </a:p>
         </p:txBody>
       </p:sp>
-      <mc:AlternateContent xmlns:mc="http://schemas.openxmlformats.org/markup-compatibility/2006">
-        <mc:Choice xmlns:a14="http://schemas.microsoft.com/office/drawing/2010/main" Requires="a14">
+      <mc:AlternateContent xmlns:mc="http://schemas.openxmlformats.org/markup-compatibility/2006" xmlns:a14="http://schemas.microsoft.com/office/drawing/2010/main">
+        <mc:Choice Requires="a14">
           <p:sp>
             <p:nvSpPr>
               <p:cNvPr id="6" name="テキスト ボックス 5">
@@ -6443,7 +6600,7 @@
             </p:txBody>
           </p:sp>
         </mc:Choice>
-        <mc:Fallback>
+        <mc:Fallback xmlns="">
           <p:sp>
             <p:nvSpPr>
               <p:cNvPr id="6" name="テキスト ボックス 5">
@@ -6554,8 +6711,8 @@
           </a:p>
         </p:txBody>
       </p:sp>
-      <mc:AlternateContent xmlns:mc="http://schemas.openxmlformats.org/markup-compatibility/2006">
-        <mc:Choice xmlns:a14="http://schemas.microsoft.com/office/drawing/2010/main" Requires="a14">
+      <mc:AlternateContent xmlns:mc="http://schemas.openxmlformats.org/markup-compatibility/2006" xmlns:a14="http://schemas.microsoft.com/office/drawing/2010/main">
+        <mc:Choice Requires="a14">
           <p:sp>
             <p:nvSpPr>
               <p:cNvPr id="6" name="テキスト ボックス 5">
@@ -6888,7 +7045,7 @@
             </p:txBody>
           </p:sp>
         </mc:Choice>
-        <mc:Fallback>
+        <mc:Fallback xmlns="">
           <p:sp>
             <p:nvSpPr>
               <p:cNvPr id="6" name="テキスト ボックス 5">
